--- a/VOIS_Major_Project_PPT_Submission_Template.pptx
+++ b/VOIS_Major_Project_PPT_Submission_Template.pptx
@@ -10044,7 +10044,7 @@
         <p:spPr>
           <a:xfrm>
             <a:off x="678364" y="2844750"/>
-            <a:ext cx="4998720" cy="743448"/>
+            <a:ext cx="2820616" cy="743448"/>
           </a:xfrm>
         </p:spPr>
         <p:txBody>
@@ -10360,8 +10360,8 @@
         </p:nvSpPr>
         <p:spPr>
           <a:xfrm>
-            <a:off x="957406" y="4576469"/>
-            <a:ext cx="3176362" cy="646331"/>
+            <a:off x="798786" y="4543361"/>
+            <a:ext cx="5602014" cy="369332"/>
           </a:xfrm>
           <a:prstGeom prst="rect">
             <a:avLst/>
@@ -10376,7 +10376,11 @@
           <a:p>
             <a:r>
               <a:rPr lang="en-US" b="1" dirty="0"/>
-              <a:t>AICTE STU ID : (its available in your offer letter)</a:t>
+              <a:t>AICTE STU ID : </a:t>
+            </a:r>
+            <a:r>
+              <a:rPr lang="en-US" dirty="0"/>
+              <a:t>STU69becaa8dbac91774111400</a:t>
             </a:r>
           </a:p>
         </p:txBody>
@@ -10395,7 +10399,7 @@
         </p:nvSpPr>
         <p:spPr>
           <a:xfrm>
-            <a:off x="3676262" y="2958017"/>
+            <a:off x="3408418" y="2984134"/>
             <a:ext cx="4537332" cy="369332"/>
           </a:xfrm>
           <a:prstGeom prst="rect">
@@ -10435,11 +10439,13 @@
         <p:spPr>
           <a:xfrm>
             <a:off x="826471" y="3588198"/>
-            <a:ext cx="4220845" cy="861497"/>
+            <a:ext cx="6460737" cy="861497"/>
           </a:xfrm>
         </p:spPr>
         <p:txBody>
-          <a:bodyPr/>
+          <a:bodyPr>
+            <a:normAutofit fontScale="85000" lnSpcReduction="10000"/>
+          </a:bodyPr>
           <a:lstStyle/>
           <a:p>
             <a:r>
@@ -10448,7 +10454,7 @@
                   <a:schemeClr val="tx1"/>
                 </a:solidFill>
               </a:rPr>
-              <a:t>Student Name -</a:t>
+              <a:t>Student Name – MANNEM DURGA DARSAN</a:t>
             </a:r>
             <a:endParaRPr lang="en-IN" dirty="0">
               <a:solidFill>
@@ -10465,11 +10471,30 @@
               </a:rPr>
               <a:t>College Name- </a:t>
             </a:r>
-            <a:endParaRPr lang="en-IN" dirty="0">
-              <a:solidFill>
-                <a:schemeClr val="tx1"/>
-              </a:solidFill>
-            </a:endParaRPr>
+            <a:r>
+              <a:rPr lang="en-IN" b="0" dirty="0">
+                <a:solidFill>
+                  <a:schemeClr val="tx1"/>
+                </a:solidFill>
+              </a:rPr>
+              <a:t>Seshadri Rao </a:t>
+            </a:r>
+            <a:r>
+              <a:rPr lang="en-IN" b="0" dirty="0" err="1">
+                <a:solidFill>
+                  <a:schemeClr val="tx1"/>
+                </a:solidFill>
+              </a:rPr>
+              <a:t>Gudlavalleru</a:t>
+            </a:r>
+            <a:r>
+              <a:rPr lang="en-IN" b="0" dirty="0">
+                <a:solidFill>
+                  <a:schemeClr val="tx1"/>
+                </a:solidFill>
+              </a:rPr>
+              <a:t> Engineering College</a:t>
+            </a:r>
           </a:p>
           <a:p>
             <a:endParaRPr lang="en-IN" dirty="0"/>
@@ -13781,6 +13806,44 @@
           </a:p>
         </p:txBody>
       </p:sp>
+      <p:sp>
+        <p:nvSpPr>
+          <p:cNvPr id="3" name="TextBox 2">
+            <a:extLst>
+              <a:ext uri="{FF2B5EF4-FFF2-40B4-BE49-F238E27FC236}">
+                <a16:creationId xmlns:a16="http://schemas.microsoft.com/office/drawing/2014/main" id="{BC76C291-078B-6463-48A7-644AF3EABA51}"/>
+              </a:ext>
+            </a:extLst>
+          </p:cNvPr>
+          <p:cNvSpPr txBox="1"/>
+          <p:nvPr/>
+        </p:nvSpPr>
+        <p:spPr>
+          <a:xfrm>
+            <a:off x="778594" y="1275371"/>
+            <a:ext cx="6102220" cy="646331"/>
+          </a:xfrm>
+          <a:prstGeom prst="rect">
+            <a:avLst/>
+          </a:prstGeom>
+          <a:noFill/>
+        </p:spPr>
+        <p:txBody>
+          <a:bodyPr wrap="square">
+            <a:spAutoFit/>
+          </a:bodyPr>
+          <a:lstStyle/>
+          <a:p>
+            <a:r>
+              <a:rPr lang="en-IN" dirty="0">
+                <a:hlinkClick r:id="rId3"/>
+              </a:rPr>
+              <a:t>https://github.com/darsan-0/Seasonal-Agriculture-Performance-Analysis.git</a:t>
+            </a:r>
+            <a:endParaRPr lang="en-IN" dirty="0"/>
+          </a:p>
+        </p:txBody>
+      </p:sp>
     </p:spTree>
     <p:extLst>
       <p:ext uri="{BB962C8B-B14F-4D97-AF65-F5344CB8AC3E}">
@@ -14742,6 +14805,36 @@
           </a:p>
         </p:txBody>
       </p:sp>
+      <p:pic>
+        <p:nvPicPr>
+          <p:cNvPr id="9" name="Picture 8">
+            <a:extLst>
+              <a:ext uri="{FF2B5EF4-FFF2-40B4-BE49-F238E27FC236}">
+                <a16:creationId xmlns:a16="http://schemas.microsoft.com/office/drawing/2014/main" id="{51DC07A7-B3DA-B3E6-5868-D5886B7BC1EA}"/>
+              </a:ext>
+            </a:extLst>
+          </p:cNvPr>
+          <p:cNvPicPr>
+            <a:picLocks noChangeAspect="1"/>
+          </p:cNvPicPr>
+          <p:nvPr/>
+        </p:nvPicPr>
+        <p:blipFill>
+          <a:blip r:embed="rId3"/>
+          <a:stretch>
+            <a:fillRect/>
+          </a:stretch>
+        </p:blipFill>
+        <p:spPr>
+          <a:xfrm>
+            <a:off x="786776" y="1275371"/>
+            <a:ext cx="7346002" cy="5196549"/>
+          </a:xfrm>
+          <a:prstGeom prst="rect">
+            <a:avLst/>
+          </a:prstGeom>
+        </p:spPr>
+      </p:pic>
     </p:spTree>
     <p:extLst>
       <p:ext uri="{BB962C8B-B14F-4D97-AF65-F5344CB8AC3E}">
@@ -21244,8 +21337,8 @@
         </p:blipFill>
         <p:spPr>
           <a:xfrm>
-            <a:off x="4422118" y="1797059"/>
-            <a:ext cx="4950481" cy="3056164"/>
+            <a:off x="4095682" y="1595535"/>
+            <a:ext cx="5276917" cy="3257688"/>
           </a:xfrm>
           <a:prstGeom prst="rect">
             <a:avLst/>
@@ -24603,21 +24696,21 @@
 </file>
 
 <file path=customXml/item1.xml><?xml version="1.0" encoding="utf-8"?>
+<?mso-contentType ?>
+<FormTemplates xmlns="http://schemas.microsoft.com/sharepoint/v3/contenttype/forms">
+  <Display>DocumentLibraryForm</Display>
+  <Edit>DocumentLibraryForm</Edit>
+  <New>DocumentLibraryForm</New>
+</FormTemplates>
+</file>
+
+<file path=customXml/item2.xml><?xml version="1.0" encoding="utf-8"?>
 <p:properties xmlns:p="http://schemas.microsoft.com/office/2006/metadata/properties" xmlns:xsi="http://www.w3.org/2001/XMLSchema-instance" xmlns:pc="http://schemas.microsoft.com/office/infopath/2007/PartnerControls">
   <documentManagement>
     <Status xmlns="71af3243-3dd4-4a8d-8c0d-dd76da1f02a5">Not started</Status>
     <MediaServiceKeyPoints xmlns="71af3243-3dd4-4a8d-8c0d-dd76da1f02a5" xsi:nil="true"/>
   </documentManagement>
 </p:properties>
-</file>
-
-<file path=customXml/item2.xml><?xml version="1.0" encoding="utf-8"?>
-<?mso-contentType ?>
-<FormTemplates xmlns="http://schemas.microsoft.com/sharepoint/v3/contenttype/forms">
-  <Display>DocumentLibraryForm</Display>
-  <Edit>DocumentLibraryForm</Edit>
-  <New>DocumentLibraryForm</New>
-</FormTemplates>
 </file>
 
 <file path=customXml/item3.xml><?xml version="1.0" encoding="utf-8"?>
@@ -24842,19 +24935,19 @@
 </file>
 
 <file path=customXml/itemProps1.xml><?xml version="1.0" encoding="utf-8"?>
+<ds:datastoreItem xmlns:ds="http://schemas.openxmlformats.org/officeDocument/2006/customXml" ds:itemID="{05D99ABA-76CE-4A8E-B5F0-C051B96628DE}">
+  <ds:schemaRefs>
+    <ds:schemaRef ds:uri="http://schemas.microsoft.com/sharepoint/v3/contenttype/forms"/>
+  </ds:schemaRefs>
+</ds:datastoreItem>
+</file>
+
+<file path=customXml/itemProps2.xml><?xml version="1.0" encoding="utf-8"?>
 <ds:datastoreItem xmlns:ds="http://schemas.openxmlformats.org/officeDocument/2006/customXml" ds:itemID="{4DEA9014-ED64-4558-B1E1-D03F0EE32BEB}">
   <ds:schemaRefs>
     <ds:schemaRef ds:uri="http://schemas.microsoft.com/office/2006/metadata/properties"/>
     <ds:schemaRef ds:uri="http://schemas.microsoft.com/office/infopath/2007/PartnerControls"/>
     <ds:schemaRef ds:uri="71af3243-3dd4-4a8d-8c0d-dd76da1f02a5"/>
-  </ds:schemaRefs>
-</ds:datastoreItem>
-</file>
-
-<file path=customXml/itemProps2.xml><?xml version="1.0" encoding="utf-8"?>
-<ds:datastoreItem xmlns:ds="http://schemas.openxmlformats.org/officeDocument/2006/customXml" ds:itemID="{05D99ABA-76CE-4A8E-B5F0-C051B96628DE}">
-  <ds:schemaRefs>
-    <ds:schemaRef ds:uri="http://schemas.microsoft.com/sharepoint/v3/contenttype/forms"/>
   </ds:schemaRefs>
 </ds:datastoreItem>
 </file>
